--- a/scripts/Presentation_template.pptx
+++ b/scripts/Presentation_template.pptx
@@ -5,9 +5,9 @@
     <p:sldMasterId id="2147483648" r:id="rId1"/>
   </p:sldMasterIdLst>
   <p:sldIdLst>
-    <p:sldId id="256" r:id="rId7"/>
+    <p:sldId id="256" r:id="rId2"/>
   </p:sldIdLst>
-  <p:sldSz cx="9144000" cy="6858000" type="screen4x3"/>
+  <p:sldSz cx="12192000" cy="6858000"/>
   <p:notesSz cx="6858000" cy="9144000"/>
   <p:defaultTextStyle>
     <a:defPPr>
@@ -104,6 +104,22 @@
       </a:defRPr>
     </a:lvl9pPr>
   </p:defaultTextStyle>
+  <p:extLst>
+    <p:ext uri="{EFAFB233-063F-42B5-8137-9DF3F51BA10A}">
+      <p15:sldGuideLst xmlns:p15="http://schemas.microsoft.com/office/powerpoint/2012/main">
+        <p15:guide id="1" orient="horz" pos="2160" userDrawn="1">
+          <p15:clr>
+            <a:srgbClr val="A4A3A4"/>
+          </p15:clr>
+        </p15:guide>
+        <p15:guide id="2" pos="3840" userDrawn="1">
+          <p15:clr>
+            <a:srgbClr val="A4A3A4"/>
+          </p15:clr>
+        </p15:guide>
+      </p15:sldGuideLst>
+    </p:ext>
+  </p:extLst>
 </p:presentation>
 </file>
 
@@ -136,8 +152,8 @@
         </p:nvSpPr>
         <p:spPr>
           <a:xfrm>
-            <a:off x="685800" y="2130425"/>
-            <a:ext cx="7772400" cy="1470025"/>
+            <a:off x="914400" y="2130426"/>
+            <a:ext cx="10363200" cy="1470025"/>
           </a:xfrm>
         </p:spPr>
         <p:txBody>
@@ -145,10 +161,9 @@
           <a:lstStyle/>
           <a:p>
             <a:r>
-              <a:rPr lang="en-US" smtClean="0"/>
+              <a:rPr lang="en-US"/>
               <a:t>Click to edit Master title style</a:t>
             </a:r>
-            <a:endParaRPr lang="en-US"/>
           </a:p>
         </p:txBody>
       </p:sp>
@@ -164,8 +179,8 @@
         </p:nvSpPr>
         <p:spPr>
           <a:xfrm>
-            <a:off x="1371600" y="3886200"/>
-            <a:ext cx="6400800" cy="1752600"/>
+            <a:off x="1828800" y="3886200"/>
+            <a:ext cx="8534400" cy="1752600"/>
           </a:xfrm>
         </p:spPr>
         <p:txBody>
@@ -264,10 +279,9 @@
           </a:lstStyle>
           <a:p>
             <a:r>
-              <a:rPr lang="en-US" smtClean="0"/>
+              <a:rPr lang="en-US"/>
               <a:t>Click to edit Master subtitle style</a:t>
             </a:r>
-            <a:endParaRPr lang="en-US"/>
           </a:p>
         </p:txBody>
       </p:sp>
@@ -288,7 +302,7 @@
           <a:p>
             <a:fld id="{5BCAD085-E8A6-8845-BD4E-CB4CCA059FC4}" type="datetimeFigureOut">
               <a:rPr lang="en-US" smtClean="0"/>
-              <a:t>1/27/13</a:t>
+              <a:t>9/21/2026</a:t>
             </a:fld>
             <a:endParaRPr lang="en-US"/>
           </a:p>
@@ -382,10 +396,9 @@
           <a:lstStyle/>
           <a:p>
             <a:r>
-              <a:rPr lang="en-US" smtClean="0"/>
+              <a:rPr lang="en-US"/>
               <a:t>Click to edit Master title style</a:t>
             </a:r>
-            <a:endParaRPr lang="en-US"/>
           </a:p>
         </p:txBody>
       </p:sp>
@@ -406,38 +419,37 @@
           <a:p>
             <a:pPr lvl="0"/>
             <a:r>
-              <a:rPr lang="en-US" smtClean="0"/>
+              <a:rPr lang="en-US"/>
               <a:t>Click to edit Master text styles</a:t>
             </a:r>
           </a:p>
           <a:p>
             <a:pPr lvl="1"/>
             <a:r>
-              <a:rPr lang="en-US" smtClean="0"/>
+              <a:rPr lang="en-US"/>
               <a:t>Second level</a:t>
             </a:r>
           </a:p>
           <a:p>
             <a:pPr lvl="2"/>
             <a:r>
-              <a:rPr lang="en-US" smtClean="0"/>
+              <a:rPr lang="en-US"/>
               <a:t>Third level</a:t>
             </a:r>
           </a:p>
           <a:p>
             <a:pPr lvl="3"/>
             <a:r>
-              <a:rPr lang="en-US" smtClean="0"/>
+              <a:rPr lang="en-US"/>
               <a:t>Fourth level</a:t>
             </a:r>
           </a:p>
           <a:p>
             <a:pPr lvl="4"/>
             <a:r>
-              <a:rPr lang="en-US" smtClean="0"/>
+              <a:rPr lang="en-US"/>
               <a:t>Fifth level</a:t>
             </a:r>
-            <a:endParaRPr lang="en-US"/>
           </a:p>
         </p:txBody>
       </p:sp>
@@ -458,7 +470,7 @@
           <a:p>
             <a:fld id="{5BCAD085-E8A6-8845-BD4E-CB4CCA059FC4}" type="datetimeFigureOut">
               <a:rPr lang="en-US" smtClean="0"/>
-              <a:t>1/27/13</a:t>
+              <a:t>9/21/2026</a:t>
             </a:fld>
             <a:endParaRPr lang="en-US"/>
           </a:p>
@@ -548,8 +560,8 @@
         </p:nvSpPr>
         <p:spPr>
           <a:xfrm>
-            <a:off x="6629400" y="274638"/>
-            <a:ext cx="2057400" cy="5851525"/>
+            <a:off x="8839200" y="274639"/>
+            <a:ext cx="2743200" cy="5851525"/>
           </a:xfrm>
         </p:spPr>
         <p:txBody>
@@ -557,10 +569,9 @@
           <a:lstStyle/>
           <a:p>
             <a:r>
-              <a:rPr lang="en-US" smtClean="0"/>
+              <a:rPr lang="en-US"/>
               <a:t>Click to edit Master title style</a:t>
             </a:r>
-            <a:endParaRPr lang="en-US"/>
           </a:p>
         </p:txBody>
       </p:sp>
@@ -576,8 +587,8 @@
         </p:nvSpPr>
         <p:spPr>
           <a:xfrm>
-            <a:off x="457200" y="274638"/>
-            <a:ext cx="6019800" cy="5851525"/>
+            <a:off x="609600" y="274639"/>
+            <a:ext cx="8026400" cy="5851525"/>
           </a:xfrm>
         </p:spPr>
         <p:txBody>
@@ -586,38 +597,37 @@
           <a:p>
             <a:pPr lvl="0"/>
             <a:r>
-              <a:rPr lang="en-US" smtClean="0"/>
+              <a:rPr lang="en-US"/>
               <a:t>Click to edit Master text styles</a:t>
             </a:r>
           </a:p>
           <a:p>
             <a:pPr lvl="1"/>
             <a:r>
-              <a:rPr lang="en-US" smtClean="0"/>
+              <a:rPr lang="en-US"/>
               <a:t>Second level</a:t>
             </a:r>
           </a:p>
           <a:p>
             <a:pPr lvl="2"/>
             <a:r>
-              <a:rPr lang="en-US" smtClean="0"/>
+              <a:rPr lang="en-US"/>
               <a:t>Third level</a:t>
             </a:r>
           </a:p>
           <a:p>
             <a:pPr lvl="3"/>
             <a:r>
-              <a:rPr lang="en-US" smtClean="0"/>
+              <a:rPr lang="en-US"/>
               <a:t>Fourth level</a:t>
             </a:r>
           </a:p>
           <a:p>
             <a:pPr lvl="4"/>
             <a:r>
-              <a:rPr lang="en-US" smtClean="0"/>
+              <a:rPr lang="en-US"/>
               <a:t>Fifth level</a:t>
             </a:r>
-            <a:endParaRPr lang="en-US"/>
           </a:p>
         </p:txBody>
       </p:sp>
@@ -638,7 +648,7 @@
           <a:p>
             <a:fld id="{5BCAD085-E8A6-8845-BD4E-CB4CCA059FC4}" type="datetimeFigureOut">
               <a:rPr lang="en-US" smtClean="0"/>
-              <a:t>1/27/13</a:t>
+              <a:t>9/21/2026</a:t>
             </a:fld>
             <a:endParaRPr lang="en-US"/>
           </a:p>
@@ -732,10 +742,9 @@
           <a:lstStyle/>
           <a:p>
             <a:r>
-              <a:rPr lang="en-US" smtClean="0"/>
+              <a:rPr lang="en-US"/>
               <a:t>Click to edit Master title style</a:t>
             </a:r>
-            <a:endParaRPr lang="en-US"/>
           </a:p>
         </p:txBody>
       </p:sp>
@@ -756,38 +765,37 @@
           <a:p>
             <a:pPr lvl="0"/>
             <a:r>
-              <a:rPr lang="en-US" smtClean="0"/>
+              <a:rPr lang="en-US"/>
               <a:t>Click to edit Master text styles</a:t>
             </a:r>
           </a:p>
           <a:p>
             <a:pPr lvl="1"/>
             <a:r>
-              <a:rPr lang="en-US" smtClean="0"/>
+              <a:rPr lang="en-US"/>
               <a:t>Second level</a:t>
             </a:r>
           </a:p>
           <a:p>
             <a:pPr lvl="2"/>
             <a:r>
-              <a:rPr lang="en-US" smtClean="0"/>
+              <a:rPr lang="en-US"/>
               <a:t>Third level</a:t>
             </a:r>
           </a:p>
           <a:p>
             <a:pPr lvl="3"/>
             <a:r>
-              <a:rPr lang="en-US" smtClean="0"/>
+              <a:rPr lang="en-US"/>
               <a:t>Fourth level</a:t>
             </a:r>
           </a:p>
           <a:p>
             <a:pPr lvl="4"/>
             <a:r>
-              <a:rPr lang="en-US" smtClean="0"/>
+              <a:rPr lang="en-US"/>
               <a:t>Fifth level</a:t>
             </a:r>
-            <a:endParaRPr lang="en-US"/>
           </a:p>
         </p:txBody>
       </p:sp>
@@ -808,7 +816,7 @@
           <a:p>
             <a:fld id="{5BCAD085-E8A6-8845-BD4E-CB4CCA059FC4}" type="datetimeFigureOut">
               <a:rPr lang="en-US" smtClean="0"/>
-              <a:t>1/27/13</a:t>
+              <a:t>9/21/2026</a:t>
             </a:fld>
             <a:endParaRPr lang="en-US"/>
           </a:p>
@@ -898,8 +906,8 @@
         </p:nvSpPr>
         <p:spPr>
           <a:xfrm>
-            <a:off x="722313" y="4406900"/>
-            <a:ext cx="7772400" cy="1362075"/>
+            <a:off x="963084" y="4406901"/>
+            <a:ext cx="10363200" cy="1362075"/>
           </a:xfrm>
         </p:spPr>
         <p:txBody>
@@ -911,10 +919,9 @@
           </a:lstStyle>
           <a:p>
             <a:r>
-              <a:rPr lang="en-US" smtClean="0"/>
+              <a:rPr lang="en-US"/>
               <a:t>Click to edit Master title style</a:t>
             </a:r>
-            <a:endParaRPr lang="en-US"/>
           </a:p>
         </p:txBody>
       </p:sp>
@@ -930,8 +937,8 @@
         </p:nvSpPr>
         <p:spPr>
           <a:xfrm>
-            <a:off x="722313" y="2906713"/>
-            <a:ext cx="7772400" cy="1500187"/>
+            <a:off x="963084" y="2906713"/>
+            <a:ext cx="10363200" cy="1500187"/>
           </a:xfrm>
         </p:spPr>
         <p:txBody>
@@ -1031,7 +1038,7 @@
           <a:p>
             <a:pPr lvl="0"/>
             <a:r>
-              <a:rPr lang="en-US" smtClean="0"/>
+              <a:rPr lang="en-US"/>
               <a:t>Click to edit Master text styles</a:t>
             </a:r>
           </a:p>
@@ -1054,7 +1061,7 @@
           <a:p>
             <a:fld id="{5BCAD085-E8A6-8845-BD4E-CB4CCA059FC4}" type="datetimeFigureOut">
               <a:rPr lang="en-US" smtClean="0"/>
-              <a:t>1/27/13</a:t>
+              <a:t>9/21/2026</a:t>
             </a:fld>
             <a:endParaRPr lang="en-US"/>
           </a:p>
@@ -1148,10 +1155,9 @@
           <a:lstStyle/>
           <a:p>
             <a:r>
-              <a:rPr lang="en-US" smtClean="0"/>
+              <a:rPr lang="en-US"/>
               <a:t>Click to edit Master title style</a:t>
             </a:r>
-            <a:endParaRPr lang="en-US"/>
           </a:p>
         </p:txBody>
       </p:sp>
@@ -1167,8 +1173,8 @@
         </p:nvSpPr>
         <p:spPr>
           <a:xfrm>
-            <a:off x="457200" y="1600200"/>
-            <a:ext cx="4038600" cy="4525963"/>
+            <a:off x="609600" y="1600201"/>
+            <a:ext cx="5384800" cy="4525963"/>
           </a:xfrm>
         </p:spPr>
         <p:txBody>
@@ -1205,38 +1211,37 @@
           <a:p>
             <a:pPr lvl="0"/>
             <a:r>
-              <a:rPr lang="en-US" smtClean="0"/>
+              <a:rPr lang="en-US"/>
               <a:t>Click to edit Master text styles</a:t>
             </a:r>
           </a:p>
           <a:p>
             <a:pPr lvl="1"/>
             <a:r>
-              <a:rPr lang="en-US" smtClean="0"/>
+              <a:rPr lang="en-US"/>
               <a:t>Second level</a:t>
             </a:r>
           </a:p>
           <a:p>
             <a:pPr lvl="2"/>
             <a:r>
-              <a:rPr lang="en-US" smtClean="0"/>
+              <a:rPr lang="en-US"/>
               <a:t>Third level</a:t>
             </a:r>
           </a:p>
           <a:p>
             <a:pPr lvl="3"/>
             <a:r>
-              <a:rPr lang="en-US" smtClean="0"/>
+              <a:rPr lang="en-US"/>
               <a:t>Fourth level</a:t>
             </a:r>
           </a:p>
           <a:p>
             <a:pPr lvl="4"/>
             <a:r>
-              <a:rPr lang="en-US" smtClean="0"/>
+              <a:rPr lang="en-US"/>
               <a:t>Fifth level</a:t>
             </a:r>
-            <a:endParaRPr lang="en-US"/>
           </a:p>
         </p:txBody>
       </p:sp>
@@ -1252,8 +1257,8 @@
         </p:nvSpPr>
         <p:spPr>
           <a:xfrm>
-            <a:off x="4648200" y="1600200"/>
-            <a:ext cx="4038600" cy="4525963"/>
+            <a:off x="6197600" y="1600201"/>
+            <a:ext cx="5384800" cy="4525963"/>
           </a:xfrm>
         </p:spPr>
         <p:txBody>
@@ -1290,38 +1295,37 @@
           <a:p>
             <a:pPr lvl="0"/>
             <a:r>
-              <a:rPr lang="en-US" smtClean="0"/>
+              <a:rPr lang="en-US"/>
               <a:t>Click to edit Master text styles</a:t>
             </a:r>
           </a:p>
           <a:p>
             <a:pPr lvl="1"/>
             <a:r>
-              <a:rPr lang="en-US" smtClean="0"/>
+              <a:rPr lang="en-US"/>
               <a:t>Second level</a:t>
             </a:r>
           </a:p>
           <a:p>
             <a:pPr lvl="2"/>
             <a:r>
-              <a:rPr lang="en-US" smtClean="0"/>
+              <a:rPr lang="en-US"/>
               <a:t>Third level</a:t>
             </a:r>
           </a:p>
           <a:p>
             <a:pPr lvl="3"/>
             <a:r>
-              <a:rPr lang="en-US" smtClean="0"/>
+              <a:rPr lang="en-US"/>
               <a:t>Fourth level</a:t>
             </a:r>
           </a:p>
           <a:p>
             <a:pPr lvl="4"/>
             <a:r>
-              <a:rPr lang="en-US" smtClean="0"/>
+              <a:rPr lang="en-US"/>
               <a:t>Fifth level</a:t>
             </a:r>
-            <a:endParaRPr lang="en-US"/>
           </a:p>
         </p:txBody>
       </p:sp>
@@ -1342,7 +1346,7 @@
           <a:p>
             <a:fld id="{5BCAD085-E8A6-8845-BD4E-CB4CCA059FC4}" type="datetimeFigureOut">
               <a:rPr lang="en-US" smtClean="0"/>
-              <a:t>1/27/13</a:t>
+              <a:t>9/21/2026</a:t>
             </a:fld>
             <a:endParaRPr lang="en-US"/>
           </a:p>
@@ -1440,10 +1444,9 @@
           </a:lstStyle>
           <a:p>
             <a:r>
-              <a:rPr lang="en-US" smtClean="0"/>
+              <a:rPr lang="en-US"/>
               <a:t>Click to edit Master title style</a:t>
             </a:r>
-            <a:endParaRPr lang="en-US"/>
           </a:p>
         </p:txBody>
       </p:sp>
@@ -1459,8 +1462,8 @@
         </p:nvSpPr>
         <p:spPr>
           <a:xfrm>
-            <a:off x="457200" y="1535113"/>
-            <a:ext cx="4040188" cy="639762"/>
+            <a:off x="609600" y="1535113"/>
+            <a:ext cx="5386917" cy="639762"/>
           </a:xfrm>
         </p:spPr>
         <p:txBody>
@@ -1506,7 +1509,7 @@
           <a:p>
             <a:pPr lvl="0"/>
             <a:r>
-              <a:rPr lang="en-US" smtClean="0"/>
+              <a:rPr lang="en-US"/>
               <a:t>Click to edit Master text styles</a:t>
             </a:r>
           </a:p>
@@ -1524,8 +1527,8 @@
         </p:nvSpPr>
         <p:spPr>
           <a:xfrm>
-            <a:off x="457200" y="2174875"/>
-            <a:ext cx="4040188" cy="3951288"/>
+            <a:off x="609600" y="2174875"/>
+            <a:ext cx="5386917" cy="3951288"/>
           </a:xfrm>
         </p:spPr>
         <p:txBody>
@@ -1562,38 +1565,37 @@
           <a:p>
             <a:pPr lvl="0"/>
             <a:r>
-              <a:rPr lang="en-US" smtClean="0"/>
+              <a:rPr lang="en-US"/>
               <a:t>Click to edit Master text styles</a:t>
             </a:r>
           </a:p>
           <a:p>
             <a:pPr lvl="1"/>
             <a:r>
-              <a:rPr lang="en-US" smtClean="0"/>
+              <a:rPr lang="en-US"/>
               <a:t>Second level</a:t>
             </a:r>
           </a:p>
           <a:p>
             <a:pPr lvl="2"/>
             <a:r>
-              <a:rPr lang="en-US" smtClean="0"/>
+              <a:rPr lang="en-US"/>
               <a:t>Third level</a:t>
             </a:r>
           </a:p>
           <a:p>
             <a:pPr lvl="3"/>
             <a:r>
-              <a:rPr lang="en-US" smtClean="0"/>
+              <a:rPr lang="en-US"/>
               <a:t>Fourth level</a:t>
             </a:r>
           </a:p>
           <a:p>
             <a:pPr lvl="4"/>
             <a:r>
-              <a:rPr lang="en-US" smtClean="0"/>
+              <a:rPr lang="en-US"/>
               <a:t>Fifth level</a:t>
             </a:r>
-            <a:endParaRPr lang="en-US"/>
           </a:p>
         </p:txBody>
       </p:sp>
@@ -1609,8 +1611,8 @@
         </p:nvSpPr>
         <p:spPr>
           <a:xfrm>
-            <a:off x="4645025" y="1535113"/>
-            <a:ext cx="4041775" cy="639762"/>
+            <a:off x="6193368" y="1535113"/>
+            <a:ext cx="5389033" cy="639762"/>
           </a:xfrm>
         </p:spPr>
         <p:txBody>
@@ -1656,7 +1658,7 @@
           <a:p>
             <a:pPr lvl="0"/>
             <a:r>
-              <a:rPr lang="en-US" smtClean="0"/>
+              <a:rPr lang="en-US"/>
               <a:t>Click to edit Master text styles</a:t>
             </a:r>
           </a:p>
@@ -1674,8 +1676,8 @@
         </p:nvSpPr>
         <p:spPr>
           <a:xfrm>
-            <a:off x="4645025" y="2174875"/>
-            <a:ext cx="4041775" cy="3951288"/>
+            <a:off x="6193368" y="2174875"/>
+            <a:ext cx="5389033" cy="3951288"/>
           </a:xfrm>
         </p:spPr>
         <p:txBody>
@@ -1712,38 +1714,37 @@
           <a:p>
             <a:pPr lvl="0"/>
             <a:r>
-              <a:rPr lang="en-US" smtClean="0"/>
+              <a:rPr lang="en-US"/>
               <a:t>Click to edit Master text styles</a:t>
             </a:r>
           </a:p>
           <a:p>
             <a:pPr lvl="1"/>
             <a:r>
-              <a:rPr lang="en-US" smtClean="0"/>
+              <a:rPr lang="en-US"/>
               <a:t>Second level</a:t>
             </a:r>
           </a:p>
           <a:p>
             <a:pPr lvl="2"/>
             <a:r>
-              <a:rPr lang="en-US" smtClean="0"/>
+              <a:rPr lang="en-US"/>
               <a:t>Third level</a:t>
             </a:r>
           </a:p>
           <a:p>
             <a:pPr lvl="3"/>
             <a:r>
-              <a:rPr lang="en-US" smtClean="0"/>
+              <a:rPr lang="en-US"/>
               <a:t>Fourth level</a:t>
             </a:r>
           </a:p>
           <a:p>
             <a:pPr lvl="4"/>
             <a:r>
-              <a:rPr lang="en-US" smtClean="0"/>
+              <a:rPr lang="en-US"/>
               <a:t>Fifth level</a:t>
             </a:r>
-            <a:endParaRPr lang="en-US"/>
           </a:p>
         </p:txBody>
       </p:sp>
@@ -1764,7 +1765,7 @@
           <a:p>
             <a:fld id="{5BCAD085-E8A6-8845-BD4E-CB4CCA059FC4}" type="datetimeFigureOut">
               <a:rPr lang="en-US" smtClean="0"/>
-              <a:t>1/27/13</a:t>
+              <a:t>9/21/2026</a:t>
             </a:fld>
             <a:endParaRPr lang="en-US"/>
           </a:p>
@@ -1858,10 +1859,9 @@
           <a:lstStyle/>
           <a:p>
             <a:r>
-              <a:rPr lang="en-US" smtClean="0"/>
+              <a:rPr lang="en-US"/>
               <a:t>Click to edit Master title style</a:t>
             </a:r>
-            <a:endParaRPr lang="en-US"/>
           </a:p>
         </p:txBody>
       </p:sp>
@@ -1882,7 +1882,7 @@
           <a:p>
             <a:fld id="{5BCAD085-E8A6-8845-BD4E-CB4CCA059FC4}" type="datetimeFigureOut">
               <a:rPr lang="en-US" smtClean="0"/>
-              <a:t>1/27/13</a:t>
+              <a:t>9/21/2026</a:t>
             </a:fld>
             <a:endParaRPr lang="en-US"/>
           </a:p>
@@ -1977,7 +1977,7 @@
           <a:p>
             <a:fld id="{5BCAD085-E8A6-8845-BD4E-CB4CCA059FC4}" type="datetimeFigureOut">
               <a:rPr lang="en-US" smtClean="0"/>
-              <a:t>1/27/13</a:t>
+              <a:t>9/21/2026</a:t>
             </a:fld>
             <a:endParaRPr lang="en-US"/>
           </a:p>
@@ -2067,8 +2067,8 @@
         </p:nvSpPr>
         <p:spPr>
           <a:xfrm>
-            <a:off x="457200" y="273050"/>
-            <a:ext cx="3008313" cy="1162050"/>
+            <a:off x="609601" y="273050"/>
+            <a:ext cx="4011084" cy="1162050"/>
           </a:xfrm>
         </p:spPr>
         <p:txBody>
@@ -2080,10 +2080,9 @@
           </a:lstStyle>
           <a:p>
             <a:r>
-              <a:rPr lang="en-US" smtClean="0"/>
+              <a:rPr lang="en-US"/>
               <a:t>Click to edit Master title style</a:t>
             </a:r>
-            <a:endParaRPr lang="en-US"/>
           </a:p>
         </p:txBody>
       </p:sp>
@@ -2099,8 +2098,8 @@
         </p:nvSpPr>
         <p:spPr>
           <a:xfrm>
-            <a:off x="3575050" y="273050"/>
-            <a:ext cx="5111750" cy="5853113"/>
+            <a:off x="4766733" y="273051"/>
+            <a:ext cx="6815667" cy="5853113"/>
           </a:xfrm>
         </p:spPr>
         <p:txBody>
@@ -2137,38 +2136,37 @@
           <a:p>
             <a:pPr lvl="0"/>
             <a:r>
-              <a:rPr lang="en-US" smtClean="0"/>
+              <a:rPr lang="en-US"/>
               <a:t>Click to edit Master text styles</a:t>
             </a:r>
           </a:p>
           <a:p>
             <a:pPr lvl="1"/>
             <a:r>
-              <a:rPr lang="en-US" smtClean="0"/>
+              <a:rPr lang="en-US"/>
               <a:t>Second level</a:t>
             </a:r>
           </a:p>
           <a:p>
             <a:pPr lvl="2"/>
             <a:r>
-              <a:rPr lang="en-US" smtClean="0"/>
+              <a:rPr lang="en-US"/>
               <a:t>Third level</a:t>
             </a:r>
           </a:p>
           <a:p>
             <a:pPr lvl="3"/>
             <a:r>
-              <a:rPr lang="en-US" smtClean="0"/>
+              <a:rPr lang="en-US"/>
               <a:t>Fourth level</a:t>
             </a:r>
           </a:p>
           <a:p>
             <a:pPr lvl="4"/>
             <a:r>
-              <a:rPr lang="en-US" smtClean="0"/>
+              <a:rPr lang="en-US"/>
               <a:t>Fifth level</a:t>
             </a:r>
-            <a:endParaRPr lang="en-US"/>
           </a:p>
         </p:txBody>
       </p:sp>
@@ -2184,8 +2182,8 @@
         </p:nvSpPr>
         <p:spPr>
           <a:xfrm>
-            <a:off x="457200" y="1435100"/>
-            <a:ext cx="3008313" cy="4691063"/>
+            <a:off x="609601" y="1435101"/>
+            <a:ext cx="4011084" cy="4691063"/>
           </a:xfrm>
         </p:spPr>
         <p:txBody>
@@ -2231,7 +2229,7 @@
           <a:p>
             <a:pPr lvl="0"/>
             <a:r>
-              <a:rPr lang="en-US" smtClean="0"/>
+              <a:rPr lang="en-US"/>
               <a:t>Click to edit Master text styles</a:t>
             </a:r>
           </a:p>
@@ -2254,7 +2252,7 @@
           <a:p>
             <a:fld id="{5BCAD085-E8A6-8845-BD4E-CB4CCA059FC4}" type="datetimeFigureOut">
               <a:rPr lang="en-US" smtClean="0"/>
-              <a:t>1/27/13</a:t>
+              <a:t>9/21/2026</a:t>
             </a:fld>
             <a:endParaRPr lang="en-US"/>
           </a:p>
@@ -2344,8 +2342,8 @@
         </p:nvSpPr>
         <p:spPr>
           <a:xfrm>
-            <a:off x="1792288" y="4800600"/>
-            <a:ext cx="5486400" cy="566738"/>
+            <a:off x="2389717" y="4800600"/>
+            <a:ext cx="7315200" cy="566738"/>
           </a:xfrm>
         </p:spPr>
         <p:txBody>
@@ -2357,10 +2355,9 @@
           </a:lstStyle>
           <a:p>
             <a:r>
-              <a:rPr lang="en-US" smtClean="0"/>
+              <a:rPr lang="en-US"/>
               <a:t>Click to edit Master title style</a:t>
             </a:r>
-            <a:endParaRPr lang="en-US"/>
           </a:p>
         </p:txBody>
       </p:sp>
@@ -2376,8 +2373,8 @@
         </p:nvSpPr>
         <p:spPr>
           <a:xfrm>
-            <a:off x="1792288" y="612775"/>
-            <a:ext cx="5486400" cy="4114800"/>
+            <a:off x="2389717" y="612775"/>
+            <a:ext cx="7315200" cy="4114800"/>
           </a:xfrm>
         </p:spPr>
         <p:txBody>
@@ -2437,8 +2434,8 @@
         </p:nvSpPr>
         <p:spPr>
           <a:xfrm>
-            <a:off x="1792288" y="5367338"/>
-            <a:ext cx="5486400" cy="804862"/>
+            <a:off x="2389717" y="5367338"/>
+            <a:ext cx="7315200" cy="804862"/>
           </a:xfrm>
         </p:spPr>
         <p:txBody>
@@ -2484,7 +2481,7 @@
           <a:p>
             <a:pPr lvl="0"/>
             <a:r>
-              <a:rPr lang="en-US" smtClean="0"/>
+              <a:rPr lang="en-US"/>
               <a:t>Click to edit Master text styles</a:t>
             </a:r>
           </a:p>
@@ -2507,7 +2504,7 @@
           <a:p>
             <a:fld id="{5BCAD085-E8A6-8845-BD4E-CB4CCA059FC4}" type="datetimeFigureOut">
               <a:rPr lang="en-US" smtClean="0"/>
-              <a:t>1/27/13</a:t>
+              <a:t>9/21/2026</a:t>
             </a:fld>
             <a:endParaRPr lang="en-US"/>
           </a:p>
@@ -2602,8 +2599,8 @@
         </p:nvSpPr>
         <p:spPr>
           <a:xfrm>
-            <a:off x="457200" y="274638"/>
-            <a:ext cx="8229600" cy="1143000"/>
+            <a:off x="609600" y="274638"/>
+            <a:ext cx="10972800" cy="1143000"/>
           </a:xfrm>
           <a:prstGeom prst="rect">
             <a:avLst/>
@@ -2616,10 +2613,9 @@
           <a:lstStyle/>
           <a:p>
             <a:r>
-              <a:rPr lang="en-US" smtClean="0"/>
+              <a:rPr lang="en-US"/>
               <a:t>Click to edit Master title style</a:t>
             </a:r>
-            <a:endParaRPr lang="en-US"/>
           </a:p>
         </p:txBody>
       </p:sp>
@@ -2635,8 +2631,8 @@
         </p:nvSpPr>
         <p:spPr>
           <a:xfrm>
-            <a:off x="457200" y="1600200"/>
-            <a:ext cx="8229600" cy="4525963"/>
+            <a:off x="609600" y="1600201"/>
+            <a:ext cx="10972800" cy="4525963"/>
           </a:xfrm>
           <a:prstGeom prst="rect">
             <a:avLst/>
@@ -2650,38 +2646,37 @@
           <a:p>
             <a:pPr lvl="0"/>
             <a:r>
-              <a:rPr lang="en-US" smtClean="0"/>
+              <a:rPr lang="en-US"/>
               <a:t>Click to edit Master text styles</a:t>
             </a:r>
           </a:p>
           <a:p>
             <a:pPr lvl="1"/>
             <a:r>
-              <a:rPr lang="en-US" smtClean="0"/>
+              <a:rPr lang="en-US"/>
               <a:t>Second level</a:t>
             </a:r>
           </a:p>
           <a:p>
             <a:pPr lvl="2"/>
             <a:r>
-              <a:rPr lang="en-US" smtClean="0"/>
+              <a:rPr lang="en-US"/>
               <a:t>Third level</a:t>
             </a:r>
           </a:p>
           <a:p>
             <a:pPr lvl="3"/>
             <a:r>
-              <a:rPr lang="en-US" smtClean="0"/>
+              <a:rPr lang="en-US"/>
               <a:t>Fourth level</a:t>
             </a:r>
           </a:p>
           <a:p>
             <a:pPr lvl="4"/>
             <a:r>
-              <a:rPr lang="en-US" smtClean="0"/>
+              <a:rPr lang="en-US"/>
               <a:t>Fifth level</a:t>
             </a:r>
-            <a:endParaRPr lang="en-US"/>
           </a:p>
         </p:txBody>
       </p:sp>
@@ -2697,8 +2692,8 @@
         </p:nvSpPr>
         <p:spPr>
           <a:xfrm>
-            <a:off x="457200" y="6356350"/>
-            <a:ext cx="2133600" cy="365125"/>
+            <a:off x="609600" y="6356351"/>
+            <a:ext cx="2844800" cy="365125"/>
           </a:xfrm>
           <a:prstGeom prst="rect">
             <a:avLst/>
@@ -2720,7 +2715,7 @@
           <a:p>
             <a:fld id="{5BCAD085-E8A6-8845-BD4E-CB4CCA059FC4}" type="datetimeFigureOut">
               <a:rPr lang="en-US" smtClean="0"/>
-              <a:t>1/27/13</a:t>
+              <a:t>9/21/2026</a:t>
             </a:fld>
             <a:endParaRPr lang="en-US"/>
           </a:p>
@@ -2738,8 +2733,8 @@
         </p:nvSpPr>
         <p:spPr>
           <a:xfrm>
-            <a:off x="3124200" y="6356350"/>
-            <a:ext cx="2895600" cy="365125"/>
+            <a:off x="4165600" y="6356351"/>
+            <a:ext cx="3860800" cy="365125"/>
           </a:xfrm>
           <a:prstGeom prst="rect">
             <a:avLst/>
@@ -2775,8 +2770,8 @@
         </p:nvSpPr>
         <p:spPr>
           <a:xfrm>
-            <a:off x="6553200" y="6356350"/>
-            <a:ext cx="2133600" cy="365125"/>
+            <a:off x="8737600" y="6356351"/>
+            <a:ext cx="2844800" cy="365125"/>
           </a:xfrm>
           <a:prstGeom prst="rect">
             <a:avLst/>
@@ -3079,7 +3074,7 @@
 </file>
 
 <file path=ppt/slides/slide1.xml><?xml version="1.0" encoding="utf-8"?>
-<p:sld xmlns:a="http://schemas.openxmlformats.org/drawingml/2006/main" xmlns:p="http://schemas.openxmlformats.org/presentationml/2006/main" xmlns:r="http://schemas.openxmlformats.org/officeDocument/2006/relationships">
+<p:sld xmlns:a="http://schemas.openxmlformats.org/drawingml/2006/main" xmlns:r="http://schemas.openxmlformats.org/officeDocument/2006/relationships" xmlns:p="http://schemas.openxmlformats.org/presentationml/2006/main">
   <p:cSld>
     <p:spTree>
       <p:nvGrpSpPr>
@@ -3087,7 +3082,14 @@
         <p:cNvGrpSpPr/>
         <p:nvPr/>
       </p:nvGrpSpPr>
-      <p:grpSpPr/>
+      <p:grpSpPr>
+        <a:xfrm>
+          <a:off x="0" y="0"/>
+          <a:ext cx="0" cy="0"/>
+          <a:chOff x="0" y="0"/>
+          <a:chExt cx="0" cy="0"/>
+        </a:xfrm>
+      </p:grpSpPr>
       <p:sp>
         <p:nvSpPr>
           <p:cNvPr id="2" name="Title 1"/>
